--- a/docs/outro.pptx
+++ b/docs/outro.pptx
@@ -5,8 +5,7 @@
     <p:sldMasterId id="2147483648" r:id="rId1"/>
   </p:sldMasterIdLst>
   <p:sldIdLst>
-    <p:sldId id="258" r:id="rId2"/>
-    <p:sldId id="259" r:id="rId3"/>
+    <p:sldId id="259" r:id="rId2"/>
   </p:sldIdLst>
   <p:sldSz cx="9144000" cy="6858000" type="screen4x3"/>
   <p:notesSz cx="6858000" cy="9144000"/>
@@ -3077,6 +3076,14 @@
 <file path=ppt/slides/slide1.xml><?xml version="1.0" encoding="utf-8"?>
 <p:sld xmlns:a="http://schemas.openxmlformats.org/drawingml/2006/main" xmlns:r="http://schemas.openxmlformats.org/officeDocument/2006/relationships" xmlns:p="http://schemas.openxmlformats.org/presentationml/2006/main">
   <p:cSld>
+    <p:bg>
+      <p:bgPr>
+        <a:solidFill>
+          <a:schemeClr val="bg1"/>
+        </a:solidFill>
+        <a:effectLst/>
+      </p:bgPr>
+    </p:bg>
     <p:spTree>
       <p:nvGrpSpPr>
         <p:cNvPr id="1" name=""/>
@@ -3093,144 +3100,67 @@
       </p:grpSpPr>
       <p:sp>
         <p:nvSpPr>
-          <p:cNvPr id="2" name="Title 1">
+          <p:cNvPr id="8" name="Rectangle 7">
             <a:extLst>
               <a:ext uri="{FF2B5EF4-FFF2-40B4-BE49-F238E27FC236}">
-                <a16:creationId xmlns:a16="http://schemas.microsoft.com/office/drawing/2014/main" id="{0F1716C1-A0C7-F010-1AAB-70A169834FCC}"/>
+                <a16:creationId xmlns:a16="http://schemas.microsoft.com/office/drawing/2014/main" id="{A4AC5506-6312-4701-8D3C-40187889A947}"/>
+              </a:ext>
+              <a:ext uri="{C183D7F6-B498-43B3-948B-1728B52AA6E4}">
+                <adec:decorative xmlns:adec="http://schemas.microsoft.com/office/drawing/2017/decorative" val="1"/>
               </a:ext>
             </a:extLst>
           </p:cNvPr>
           <p:cNvSpPr>
-            <a:spLocks noGrp="1"/>
-          </p:cNvSpPr>
-          <p:nvPr>
-            <p:ph type="ctrTitle"/>
+            <a:spLocks noGrp="1" noRot="1" noChangeAspect="1" noMove="1" noResize="1" noEditPoints="1" noAdjustHandles="1" noChangeArrowheads="1" noChangeShapeType="1" noTextEdit="1"/>
+          </p:cNvSpPr>
+          <p:nvPr>
+            <p:extLst>
+              <p:ext uri="{386F3935-93C4-4BCD-93E2-E3B085C9AB24}">
+                <p16:designElem xmlns:p16="http://schemas.microsoft.com/office/powerpoint/2015/main" val="1"/>
+              </p:ext>
+            </p:extLst>
           </p:nvPr>
         </p:nvSpPr>
         <p:spPr>
           <a:xfrm>
-            <a:off x="685800" y="2130425"/>
-            <a:ext cx="7772400" cy="2156762"/>
+            <a:off x="0" y="651752"/>
+            <a:ext cx="9144000" cy="736551"/>
           </a:xfrm>
+          <a:prstGeom prst="rect">
+            <a:avLst/>
+          </a:prstGeom>
+          <a:solidFill>
+            <a:schemeClr val="tx1"/>
+          </a:solidFill>
+          <a:ln>
+            <a:noFill/>
+          </a:ln>
         </p:spPr>
-        <p:txBody>
-          <a:bodyPr/>
-          <a:lstStyle/>
-          <a:p>
-            <a:r>
-              <a:rPr lang="en-US" dirty="0"/>
-              <a:t>Nine Ways to Inherit in Rust</a:t>
-            </a:r>
-            <a:br>
-              <a:rPr lang="en-US" dirty="0"/>
-            </a:br>
-            <a:r>
-              <a:rPr lang="en-US" dirty="0"/>
-              <a:t>a Language without Inheritance</a:t>
-            </a:r>
-          </a:p>
-        </p:txBody>
-      </p:sp>
-      <p:sp>
-        <p:nvSpPr>
-          <p:cNvPr id="3" name="Subtitle 2">
-            <a:extLst>
-              <a:ext uri="{FF2B5EF4-FFF2-40B4-BE49-F238E27FC236}">
-                <a16:creationId xmlns:a16="http://schemas.microsoft.com/office/drawing/2014/main" id="{EDDA8930-B56D-9DEE-8C75-29B72AAB61A7}"/>
-              </a:ext>
-            </a:extLst>
-          </p:cNvPr>
-          <p:cNvSpPr>
-            <a:spLocks noGrp="1"/>
-          </p:cNvSpPr>
-          <p:nvPr>
-            <p:ph type="subTitle" idx="1"/>
-          </p:nvPr>
-        </p:nvSpPr>
-        <p:spPr>
-          <a:xfrm>
-            <a:off x="1" y="3689207"/>
-            <a:ext cx="9143999" cy="2156762"/>
-          </a:xfrm>
-        </p:spPr>
-        <p:txBody>
-          <a:bodyPr>
-            <a:normAutofit/>
-          </a:bodyPr>
-          <a:lstStyle/>
-          <a:p>
-            <a:endParaRPr lang="en-US" dirty="0"/>
-          </a:p>
-          <a:p>
-            <a:endParaRPr lang="en-US" dirty="0"/>
-          </a:p>
-          <a:p>
-            <a:endParaRPr lang="en-US" dirty="0"/>
-          </a:p>
-          <a:p>
-            <a:r>
-              <a:rPr lang="en-US" sz="1350" dirty="0">
-                <a:solidFill>
-                  <a:schemeClr val="bg1">
-                    <a:lumMod val="50000"/>
-                  </a:schemeClr>
-                </a:solidFill>
-              </a:rPr>
-              <a:t>Carl Kadie · github.com/</a:t>
-            </a:r>
-            <a:r>
-              <a:rPr lang="en-US" sz="1350" dirty="0" err="1">
-                <a:solidFill>
-                  <a:schemeClr val="bg1">
-                    <a:lumMod val="50000"/>
-                  </a:schemeClr>
-                </a:solidFill>
-              </a:rPr>
-              <a:t>CarlKCarlK</a:t>
-            </a:r>
-            <a:r>
-              <a:rPr lang="en-US" sz="1350" dirty="0">
-                <a:solidFill>
-                  <a:schemeClr val="bg1">
-                    <a:lumMod val="50000"/>
-                  </a:schemeClr>
-                </a:solidFill>
-              </a:rPr>
-              <a:t>/device-envoy</a:t>
-            </a:r>
-          </a:p>
-        </p:txBody>
-      </p:sp>
-    </p:spTree>
-    <p:extLst>
-      <p:ext uri="{BB962C8B-B14F-4D97-AF65-F5344CB8AC3E}">
-        <p14:creationId xmlns:p14="http://schemas.microsoft.com/office/powerpoint/2010/main" val="1079877387"/>
-      </p:ext>
-    </p:extLst>
-  </p:cSld>
-  <p:clrMapOvr>
-    <a:masterClrMapping/>
-  </p:clrMapOvr>
-</p:sld>
-</file>
-
-<file path=ppt/slides/slide2.xml><?xml version="1.0" encoding="utf-8"?>
-<p:sld xmlns:a="http://schemas.openxmlformats.org/drawingml/2006/main" xmlns:r="http://schemas.openxmlformats.org/officeDocument/2006/relationships" xmlns:p="http://schemas.openxmlformats.org/presentationml/2006/main">
-  <p:cSld>
-    <p:spTree>
-      <p:nvGrpSpPr>
-        <p:cNvPr id="1" name=""/>
-        <p:cNvGrpSpPr/>
-        <p:nvPr/>
-      </p:nvGrpSpPr>
-      <p:grpSpPr>
-        <a:xfrm>
-          <a:off x="0" y="0"/>
-          <a:ext cx="0" cy="0"/>
-          <a:chOff x="0" y="0"/>
-          <a:chExt cx="0" cy="0"/>
-        </a:xfrm>
-      </p:grpSpPr>
+        <p:style>
+          <a:lnRef idx="2">
+            <a:schemeClr val="accent1">
+              <a:shade val="50000"/>
+            </a:schemeClr>
+          </a:lnRef>
+          <a:fillRef idx="1">
+            <a:schemeClr val="accent1"/>
+          </a:fillRef>
+          <a:effectRef idx="0">
+            <a:schemeClr val="accent1"/>
+          </a:effectRef>
+          <a:fontRef idx="minor">
+            <a:schemeClr val="lt1"/>
+          </a:fontRef>
+        </p:style>
+        <p:txBody>
+          <a:bodyPr rtlCol="0" anchor="ctr"/>
+          <a:lstStyle/>
+          <a:p>
+            <a:pPr algn="ctr"/>
+            <a:endParaRPr lang="en-US"/>
+          </a:p>
+        </p:txBody>
+      </p:sp>
       <p:sp>
         <p:nvSpPr>
           <p:cNvPr id="2" name="Title 1">
@@ -3247,97 +3177,838 @@
             <p:ph type="title"/>
           </p:nvPr>
         </p:nvSpPr>
-        <p:spPr/>
-        <p:txBody>
-          <a:bodyPr/>
-          <a:lstStyle/>
-          <a:p>
-            <a:r>
-              <a:rPr lang="en-US" dirty="0"/>
-              <a:t>Introduction</a:t>
-            </a:r>
-          </a:p>
-        </p:txBody>
-      </p:sp>
-      <p:sp>
-        <p:nvSpPr>
-          <p:cNvPr id="3" name="Content Placeholder 2">
-            <a:extLst>
-              <a:ext uri="{FF2B5EF4-FFF2-40B4-BE49-F238E27FC236}">
-                <a16:creationId xmlns:a16="http://schemas.microsoft.com/office/drawing/2014/main" id="{DDCE6C18-6B37-A546-685E-EE5B6A59D200}"/>
-              </a:ext>
-            </a:extLst>
-          </p:cNvPr>
-          <p:cNvSpPr>
-            <a:spLocks noGrp="1"/>
-          </p:cNvSpPr>
-          <p:nvPr>
-            <p:ph idx="1"/>
-          </p:nvPr>
-        </p:nvSpPr>
-        <p:spPr/>
-        <p:txBody>
-          <a:bodyPr/>
-          <a:lstStyle/>
-          <a:p>
-            <a:r>
-              <a:rPr lang="en-US" dirty="0"/>
-              <a:t>Rust has </a:t>
-            </a:r>
-            <a:r>
-              <a:rPr lang="en-US" b="1" dirty="0"/>
-              <a:t>objects</a:t>
-            </a:r>
-            <a:r>
-              <a:rPr lang="en-US" dirty="0"/>
-              <a:t>, but not </a:t>
-            </a:r>
-            <a:r>
-              <a:rPr lang="en-US" b="1" dirty="0"/>
-              <a:t>class inheritance</a:t>
-            </a:r>
-          </a:p>
-          <a:p>
-            <a:r>
-              <a:rPr lang="en-US" dirty="0"/>
-              <a:t>Defining “object-oriented” is controversial</a:t>
-            </a:r>
-          </a:p>
-          <a:p>
-            <a:pPr lvl="1"/>
-            <a:r>
-              <a:rPr lang="en-US" dirty="0"/>
-              <a:t>Skip that debate</a:t>
-            </a:r>
-          </a:p>
-          <a:p>
-            <a:pPr lvl="1"/>
-            <a:r>
-              <a:rPr lang="en-US" dirty="0"/>
-              <a:t>How do we share behavior across related types?</a:t>
-            </a:r>
-          </a:p>
-          <a:p>
-            <a:r>
-              <a:rPr lang="en-US" dirty="0"/>
-              <a:t>Credentials: C++, C#, Python*, Smalltalk</a:t>
-            </a:r>
-          </a:p>
-          <a:p>
-            <a:r>
-              <a:rPr lang="en-US" dirty="0"/>
-              <a:t>Format: 9 puzzles &amp; Rust solutions</a:t>
-            </a:r>
-          </a:p>
-          <a:p>
-            <a:pPr lvl="1"/>
-            <a:r>
-              <a:rPr lang="en-US" dirty="0"/>
-              <a:t>inspired by real code</a:t>
-            </a:r>
-          </a:p>
-        </p:txBody>
-      </p:sp>
+        <p:spPr>
+          <a:xfrm>
+            <a:off x="417399" y="643467"/>
+            <a:ext cx="8408193" cy="744836"/>
+          </a:xfrm>
+        </p:spPr>
+        <p:txBody>
+          <a:bodyPr vert="horz" lIns="91440" tIns="45720" rIns="91440" bIns="45720" rtlCol="0" anchor="ctr">
+            <a:normAutofit/>
+          </a:bodyPr>
+          <a:lstStyle/>
+          <a:p>
+            <a:pPr defTabSz="914400">
+              <a:lnSpc>
+                <a:spcPct val="90000"/>
+              </a:lnSpc>
+            </a:pPr>
+            <a:r>
+              <a:rPr lang="en-US" sz="2800" kern="1200">
+                <a:solidFill>
+                  <a:schemeClr val="bg1"/>
+                </a:solidFill>
+                <a:latin typeface="+mj-lt"/>
+                <a:ea typeface="+mj-ea"/>
+                <a:cs typeface="+mj-cs"/>
+              </a:rPr>
+              <a:t>Conclusion</a:t>
+            </a:r>
+          </a:p>
+        </p:txBody>
+      </p:sp>
+      <p:graphicFrame>
+        <p:nvGraphicFramePr>
+          <p:cNvPr id="3" name="Table 3"/>
+          <p:cNvGraphicFramePr>
+            <a:graphicFrameLocks noGrp="1"/>
+          </p:cNvGraphicFramePr>
+          <p:nvPr>
+            <p:extLst>
+              <p:ext uri="{D42A27DB-BD31-4B8C-83A1-F6EECF244321}">
+                <p14:modId xmlns:p14="http://schemas.microsoft.com/office/powerpoint/2010/main" val="705945333"/>
+              </p:ext>
+            </p:extLst>
+          </p:nvPr>
+        </p:nvGraphicFramePr>
+        <p:xfrm>
+          <a:off x="482599" y="1511891"/>
+          <a:ext cx="8537575" cy="4159716"/>
+        </p:xfrm>
+        <a:graphic>
+          <a:graphicData uri="http://schemas.openxmlformats.org/drawingml/2006/table">
+            <a:tbl>
+              <a:tblPr firstRow="1" bandRow="1">
+                <a:noFill/>
+              </a:tblPr>
+              <a:tblGrid>
+                <a:gridCol w="3794478">
+                  <a:extLst>
+                    <a:ext uri="{9D8B030D-6E8A-4147-A177-3AD203B41FA5}">
+                      <a16:colId xmlns:a16="http://schemas.microsoft.com/office/drawing/2014/main" val="20000"/>
+                    </a:ext>
+                  </a:extLst>
+                </a:gridCol>
+                <a:gridCol w="4743097">
+                  <a:extLst>
+                    <a:ext uri="{9D8B030D-6E8A-4147-A177-3AD203B41FA5}">
+                      <a16:colId xmlns:a16="http://schemas.microsoft.com/office/drawing/2014/main" val="20001"/>
+                    </a:ext>
+                  </a:extLst>
+                </a:gridCol>
+              </a:tblGrid>
+              <a:tr h="479372">
+                <a:tc>
+                  <a:txBody>
+                    <a:bodyPr/>
+                    <a:lstStyle/>
+                    <a:p>
+                      <a:r>
+                        <a:rPr lang="en-US" sz="1800" b="1" cap="none" spc="0">
+                          <a:solidFill>
+                            <a:schemeClr val="tx1"/>
+                          </a:solidFill>
+                        </a:rPr>
+                        <a:t>Trait Default Methods</a:t>
+                      </a:r>
+                    </a:p>
+                  </a:txBody>
+                  <a:tcPr marL="90876" marR="90876" marT="63613" marB="63613">
+                    <a:lnL w="28575" cap="flat" cmpd="sng" algn="ctr">
+                      <a:noFill/>
+                      <a:prstDash val="solid"/>
+                    </a:lnL>
+                    <a:lnR w="12700" cmpd="sng">
+                      <a:noFill/>
+                      <a:prstDash val="solid"/>
+                    </a:lnR>
+                    <a:lnT w="38100" cmpd="sng">
+                      <a:noFill/>
+                    </a:lnT>
+                    <a:lnB w="12700" cap="flat" cmpd="sng" algn="ctr">
+                      <a:noFill/>
+                      <a:prstDash val="solid"/>
+                    </a:lnB>
+                    <a:noFill/>
+                  </a:tcPr>
+                </a:tc>
+                <a:tc>
+                  <a:txBody>
+                    <a:bodyPr/>
+                    <a:lstStyle/>
+                    <a:p>
+                      <a:r>
+                        <a:rPr lang="en-US" sz="1800" cap="none" spc="0" dirty="0">
+                          <a:solidFill>
+                            <a:schemeClr val="tx1"/>
+                          </a:solidFill>
+                        </a:rPr>
+                        <a:t>“Interface” defines default implementation</a:t>
+                      </a:r>
+                    </a:p>
+                  </a:txBody>
+                  <a:tcPr marL="90876" marR="90876" marT="63613" marB="63613">
+                    <a:lnL w="12700" cmpd="sng">
+                      <a:noFill/>
+                      <a:prstDash val="solid"/>
+                    </a:lnL>
+                    <a:lnR w="28575" cap="flat" cmpd="sng" algn="ctr">
+                      <a:noFill/>
+                      <a:prstDash val="solid"/>
+                    </a:lnR>
+                    <a:lnT w="38100" cmpd="sng">
+                      <a:noFill/>
+                    </a:lnT>
+                    <a:lnB w="12700" cap="flat" cmpd="sng" algn="ctr">
+                      <a:noFill/>
+                      <a:prstDash val="solid"/>
+                    </a:lnB>
+                    <a:noFill/>
+                  </a:tcPr>
+                </a:tc>
+                <a:extLst>
+                  <a:ext uri="{0D108BD9-81ED-4DB2-BD59-A6C34878D82A}">
+                    <a16:rowId xmlns:a16="http://schemas.microsoft.com/office/drawing/2014/main" val="10001"/>
+                  </a:ext>
+                </a:extLst>
+              </a:tr>
+              <a:tr h="440714">
+                <a:tc>
+                  <a:txBody>
+                    <a:bodyPr/>
+                    <a:lstStyle/>
+                    <a:p>
+                      <a:r>
+                        <a:rPr lang="en-US" sz="1800" b="1" cap="none" spc="0" dirty="0" err="1">
+                          <a:solidFill>
+                            <a:schemeClr val="tx1"/>
+                          </a:solidFill>
+                        </a:rPr>
+                        <a:t>Supertrait</a:t>
+                      </a:r>
+                      <a:r>
+                        <a:rPr lang="en-US" sz="1800" b="1" cap="none" spc="0" dirty="0">
+                          <a:solidFill>
+                            <a:schemeClr val="tx1"/>
+                          </a:solidFill>
+                        </a:rPr>
+                        <a:t> Default Methods</a:t>
+                      </a:r>
+                    </a:p>
+                  </a:txBody>
+                  <a:tcPr marL="90876" marR="90876" marT="63613" marB="63613">
+                    <a:lnL w="12700" cmpd="sng">
+                      <a:noFill/>
+                      <a:prstDash val="solid"/>
+                    </a:lnL>
+                    <a:lnR w="12700" cmpd="sng">
+                      <a:noFill/>
+                      <a:prstDash val="solid"/>
+                    </a:lnR>
+                    <a:lnT w="12700" cap="flat" cmpd="sng" algn="ctr">
+                      <a:noFill/>
+                      <a:prstDash val="solid"/>
+                    </a:lnT>
+                    <a:lnB w="12700" cmpd="sng">
+                      <a:noFill/>
+                      <a:prstDash val="solid"/>
+                    </a:lnB>
+                    <a:solidFill>
+                      <a:schemeClr val="bg1">
+                        <a:lumMod val="95000"/>
+                      </a:schemeClr>
+                    </a:solidFill>
+                  </a:tcPr>
+                </a:tc>
+                <a:tc>
+                  <a:txBody>
+                    <a:bodyPr/>
+                    <a:lstStyle/>
+                    <a:p>
+                      <a:r>
+                        <a:rPr lang="en-US" sz="1800" cap="none" spc="0" dirty="0">
+                          <a:solidFill>
+                            <a:schemeClr val="tx1"/>
+                          </a:solidFill>
+                        </a:rPr>
+                        <a:t>#1 but with more levels of traits</a:t>
+                      </a:r>
+                    </a:p>
+                  </a:txBody>
+                  <a:tcPr marL="90876" marR="90876" marT="63613" marB="63613">
+                    <a:lnL w="12700" cmpd="sng">
+                      <a:noFill/>
+                      <a:prstDash val="solid"/>
+                    </a:lnL>
+                    <a:lnR w="12700" cmpd="sng">
+                      <a:noFill/>
+                      <a:prstDash val="solid"/>
+                    </a:lnR>
+                    <a:lnT w="12700" cap="flat" cmpd="sng" algn="ctr">
+                      <a:noFill/>
+                      <a:prstDash val="solid"/>
+                    </a:lnT>
+                    <a:lnB w="12700" cmpd="sng">
+                      <a:noFill/>
+                      <a:prstDash val="solid"/>
+                    </a:lnB>
+                    <a:solidFill>
+                      <a:schemeClr val="bg1">
+                        <a:lumMod val="95000"/>
+                      </a:schemeClr>
+                    </a:solidFill>
+                  </a:tcPr>
+                </a:tc>
+                <a:extLst>
+                  <a:ext uri="{0D108BD9-81ED-4DB2-BD59-A6C34878D82A}">
+                    <a16:rowId xmlns:a16="http://schemas.microsoft.com/office/drawing/2014/main" val="10002"/>
+                  </a:ext>
+                </a:extLst>
+              </a:tr>
+              <a:tr h="479372">
+                <a:tc>
+                  <a:txBody>
+                    <a:bodyPr/>
+                    <a:lstStyle/>
+                    <a:p>
+                      <a:r>
+                        <a:rPr lang="en-US" sz="1800" b="1" cap="none" spc="0" dirty="0">
+                          <a:solidFill>
+                            <a:schemeClr val="tx1"/>
+                          </a:solidFill>
+                        </a:rPr>
+                        <a:t>Extension Traits</a:t>
+                      </a:r>
+                    </a:p>
+                  </a:txBody>
+                  <a:tcPr marL="90876" marR="90876" marT="63613" marB="63613">
+                    <a:lnL w="28575" cap="flat" cmpd="sng" algn="ctr">
+                      <a:noFill/>
+                      <a:prstDash val="solid"/>
+                    </a:lnL>
+                    <a:lnR w="12700" cmpd="sng">
+                      <a:noFill/>
+                      <a:prstDash val="solid"/>
+                    </a:lnR>
+                    <a:lnT w="12700" cmpd="sng">
+                      <a:noFill/>
+                      <a:prstDash val="solid"/>
+                    </a:lnT>
+                    <a:lnB w="12700" cap="flat" cmpd="sng" algn="ctr">
+                      <a:noFill/>
+                      <a:prstDash val="solid"/>
+                    </a:lnB>
+                    <a:noFill/>
+                  </a:tcPr>
+                </a:tc>
+                <a:tc>
+                  <a:txBody>
+                    <a:bodyPr/>
+                    <a:lstStyle/>
+                    <a:p>
+                      <a:r>
+                        <a:rPr lang="en-US" sz="1800" cap="none" spc="0" dirty="0">
+                          <a:solidFill>
+                            <a:schemeClr val="tx1"/>
+                          </a:solidFill>
+                        </a:rPr>
+                        <a:t>Add methods to one or a few (foreign) types</a:t>
+                      </a:r>
+                    </a:p>
+                  </a:txBody>
+                  <a:tcPr marL="90876" marR="90876" marT="63613" marB="63613">
+                    <a:lnL w="12700" cmpd="sng">
+                      <a:noFill/>
+                      <a:prstDash val="solid"/>
+                    </a:lnL>
+                    <a:lnR w="28575" cap="flat" cmpd="sng" algn="ctr">
+                      <a:noFill/>
+                      <a:prstDash val="solid"/>
+                    </a:lnR>
+                    <a:lnT w="12700" cmpd="sng">
+                      <a:noFill/>
+                      <a:prstDash val="solid"/>
+                    </a:lnT>
+                    <a:lnB w="12700" cap="flat" cmpd="sng" algn="ctr">
+                      <a:noFill/>
+                      <a:prstDash val="solid"/>
+                    </a:lnB>
+                    <a:noFill/>
+                  </a:tcPr>
+                </a:tc>
+                <a:extLst>
+                  <a:ext uri="{0D108BD9-81ED-4DB2-BD59-A6C34878D82A}">
+                    <a16:rowId xmlns:a16="http://schemas.microsoft.com/office/drawing/2014/main" val="10003"/>
+                  </a:ext>
+                </a:extLst>
+              </a:tr>
+              <a:tr h="440714">
+                <a:tc>
+                  <a:txBody>
+                    <a:bodyPr/>
+                    <a:lstStyle/>
+                    <a:p>
+                      <a:r>
+                        <a:rPr lang="en-US" sz="1800" b="1" cap="none" spc="0">
+                          <a:solidFill>
+                            <a:schemeClr val="tx1"/>
+                          </a:solidFill>
+                        </a:rPr>
+                        <a:t>Derive-Generated Implementations</a:t>
+                      </a:r>
+                    </a:p>
+                  </a:txBody>
+                  <a:tcPr marL="90876" marR="90876" marT="63613" marB="63613">
+                    <a:lnL w="12700" cmpd="sng">
+                      <a:noFill/>
+                      <a:prstDash val="solid"/>
+                    </a:lnL>
+                    <a:lnR w="12700" cmpd="sng">
+                      <a:noFill/>
+                      <a:prstDash val="solid"/>
+                    </a:lnR>
+                    <a:lnT w="12700" cap="flat" cmpd="sng" algn="ctr">
+                      <a:noFill/>
+                      <a:prstDash val="solid"/>
+                    </a:lnT>
+                    <a:lnB w="12700" cmpd="sng">
+                      <a:noFill/>
+                      <a:prstDash val="solid"/>
+                    </a:lnB>
+                    <a:solidFill>
+                      <a:schemeClr val="bg1">
+                        <a:lumMod val="95000"/>
+                      </a:schemeClr>
+                    </a:solidFill>
+                  </a:tcPr>
+                </a:tc>
+                <a:tc>
+                  <a:txBody>
+                    <a:bodyPr/>
+                    <a:lstStyle/>
+                    <a:p>
+                      <a:r>
+                        <a:rPr lang="en-US" sz="1800" cap="none" spc="0" dirty="0">
+                          <a:solidFill>
+                            <a:schemeClr val="tx1"/>
+                          </a:solidFill>
+                          <a:latin typeface="Cascadia Mono" panose="020B0609020000020004" pitchFamily="49" charset="0"/>
+                          <a:cs typeface="Cascadia Mono" panose="020B0609020000020004" pitchFamily="49" charset="0"/>
+                        </a:rPr>
+                        <a:t>#[derive(Clone, Debug, etc.)]</a:t>
+                      </a:r>
+                    </a:p>
+                  </a:txBody>
+                  <a:tcPr marL="90876" marR="90876" marT="63613" marB="63613">
+                    <a:lnL w="12700" cmpd="sng">
+                      <a:noFill/>
+                      <a:prstDash val="solid"/>
+                    </a:lnL>
+                    <a:lnR w="12700" cmpd="sng">
+                      <a:noFill/>
+                      <a:prstDash val="solid"/>
+                    </a:lnR>
+                    <a:lnT w="12700" cap="flat" cmpd="sng" algn="ctr">
+                      <a:noFill/>
+                      <a:prstDash val="solid"/>
+                    </a:lnT>
+                    <a:lnB w="12700" cmpd="sng">
+                      <a:noFill/>
+                      <a:prstDash val="solid"/>
+                    </a:lnB>
+                    <a:solidFill>
+                      <a:schemeClr val="bg1">
+                        <a:lumMod val="95000"/>
+                      </a:schemeClr>
+                    </a:solidFill>
+                  </a:tcPr>
+                </a:tc>
+                <a:extLst>
+                  <a:ext uri="{0D108BD9-81ED-4DB2-BD59-A6C34878D82A}">
+                    <a16:rowId xmlns:a16="http://schemas.microsoft.com/office/drawing/2014/main" val="10004"/>
+                  </a:ext>
+                </a:extLst>
+              </a:tr>
+              <a:tr h="479372">
+                <a:tc>
+                  <a:txBody>
+                    <a:bodyPr/>
+                    <a:lstStyle/>
+                    <a:p>
+                      <a:r>
+                        <a:rPr lang="en-US" sz="1800" b="1" cap="none" spc="0">
+                          <a:solidFill>
+                            <a:schemeClr val="tx1"/>
+                          </a:solidFill>
+                        </a:rPr>
+                        <a:t>Deref Method Lookup</a:t>
+                      </a:r>
+                    </a:p>
+                  </a:txBody>
+                  <a:tcPr marL="90876" marR="90876" marT="63613" marB="63613">
+                    <a:lnL w="28575" cap="flat" cmpd="sng" algn="ctr">
+                      <a:noFill/>
+                      <a:prstDash val="solid"/>
+                    </a:lnL>
+                    <a:lnR w="12700" cmpd="sng">
+                      <a:noFill/>
+                      <a:prstDash val="solid"/>
+                    </a:lnR>
+                    <a:lnT w="12700" cmpd="sng">
+                      <a:noFill/>
+                      <a:prstDash val="solid"/>
+                    </a:lnT>
+                    <a:lnB w="12700" cap="flat" cmpd="sng" algn="ctr">
+                      <a:noFill/>
+                      <a:prstDash val="solid"/>
+                    </a:lnB>
+                    <a:noFill/>
+                  </a:tcPr>
+                </a:tc>
+                <a:tc>
+                  <a:txBody>
+                    <a:bodyPr/>
+                    <a:lstStyle/>
+                    <a:p>
+                      <a:r>
+                        <a:rPr lang="en-US" sz="1800" cap="none" spc="0" dirty="0">
+                          <a:solidFill>
+                            <a:schemeClr val="tx1"/>
+                          </a:solidFill>
+                        </a:rPr>
+                        <a:t>Add methods to concrete types like </a:t>
+                      </a:r>
+                      <a:r>
+                        <a:rPr lang="en-US" sz="1800" cap="none" spc="0" dirty="0">
+                          <a:solidFill>
+                            <a:schemeClr val="tx1"/>
+                          </a:solidFill>
+                          <a:latin typeface="Cascadia Mono" panose="020B0609020000020004" pitchFamily="49" charset="0"/>
+                          <a:cs typeface="Cascadia Mono" panose="020B0609020000020004" pitchFamily="49" charset="0"/>
+                        </a:rPr>
+                        <a:t>String</a:t>
+                      </a:r>
+                    </a:p>
+                  </a:txBody>
+                  <a:tcPr marL="90876" marR="90876" marT="63613" marB="63613">
+                    <a:lnL w="12700" cmpd="sng">
+                      <a:noFill/>
+                      <a:prstDash val="solid"/>
+                    </a:lnL>
+                    <a:lnR w="28575" cap="flat" cmpd="sng" algn="ctr">
+                      <a:noFill/>
+                      <a:prstDash val="solid"/>
+                    </a:lnR>
+                    <a:lnT w="12700" cmpd="sng">
+                      <a:noFill/>
+                      <a:prstDash val="solid"/>
+                    </a:lnT>
+                    <a:lnB w="12700" cap="flat" cmpd="sng" algn="ctr">
+                      <a:noFill/>
+                      <a:prstDash val="solid"/>
+                    </a:lnB>
+                    <a:noFill/>
+                  </a:tcPr>
+                </a:tc>
+                <a:extLst>
+                  <a:ext uri="{0D108BD9-81ED-4DB2-BD59-A6C34878D82A}">
+                    <a16:rowId xmlns:a16="http://schemas.microsoft.com/office/drawing/2014/main" val="10005"/>
+                  </a:ext>
+                </a:extLst>
+              </a:tr>
+              <a:tr h="440714">
+                <a:tc>
+                  <a:txBody>
+                    <a:bodyPr/>
+                    <a:lstStyle/>
+                    <a:p>
+                      <a:r>
+                        <a:rPr lang="en-US" sz="1800" b="1" cap="none" spc="0" dirty="0">
+                          <a:solidFill>
+                            <a:schemeClr val="tx1"/>
+                          </a:solidFill>
+                        </a:rPr>
+                        <a:t>Blanket Implementations</a:t>
+                      </a:r>
+                    </a:p>
+                  </a:txBody>
+                  <a:tcPr marL="90876" marR="90876" marT="63613" marB="63613">
+                    <a:lnL w="12700" cmpd="sng">
+                      <a:noFill/>
+                      <a:prstDash val="solid"/>
+                    </a:lnL>
+                    <a:lnR w="12700" cmpd="sng">
+                      <a:noFill/>
+                      <a:prstDash val="solid"/>
+                    </a:lnR>
+                    <a:lnT w="12700" cap="flat" cmpd="sng" algn="ctr">
+                      <a:noFill/>
+                      <a:prstDash val="solid"/>
+                    </a:lnT>
+                    <a:lnB w="12700" cmpd="sng">
+                      <a:noFill/>
+                      <a:prstDash val="solid"/>
+                    </a:lnB>
+                    <a:solidFill>
+                      <a:schemeClr val="bg1">
+                        <a:lumMod val="95000"/>
+                      </a:schemeClr>
+                    </a:solidFill>
+                  </a:tcPr>
+                </a:tc>
+                <a:tc>
+                  <a:txBody>
+                    <a:bodyPr/>
+                    <a:lstStyle/>
+                    <a:p>
+                      <a:r>
+                        <a:rPr lang="en-US" sz="1800" cap="none" spc="0">
+                          <a:solidFill>
+                            <a:schemeClr val="tx1"/>
+                          </a:solidFill>
+                        </a:rPr>
+                        <a:t>Add methods to all (foreign) types that satisfy</a:t>
+                      </a:r>
+                    </a:p>
+                  </a:txBody>
+                  <a:tcPr marL="90876" marR="90876" marT="63613" marB="63613">
+                    <a:lnL w="12700" cmpd="sng">
+                      <a:noFill/>
+                      <a:prstDash val="solid"/>
+                    </a:lnL>
+                    <a:lnR w="12700" cmpd="sng">
+                      <a:noFill/>
+                      <a:prstDash val="solid"/>
+                    </a:lnR>
+                    <a:lnT w="12700" cap="flat" cmpd="sng" algn="ctr">
+                      <a:noFill/>
+                      <a:prstDash val="solid"/>
+                    </a:lnT>
+                    <a:lnB w="12700" cmpd="sng">
+                      <a:noFill/>
+                      <a:prstDash val="solid"/>
+                    </a:lnB>
+                    <a:solidFill>
+                      <a:schemeClr val="bg1">
+                        <a:lumMod val="95000"/>
+                      </a:schemeClr>
+                    </a:solidFill>
+                  </a:tcPr>
+                </a:tc>
+                <a:extLst>
+                  <a:ext uri="{0D108BD9-81ED-4DB2-BD59-A6C34878D82A}">
+                    <a16:rowId xmlns:a16="http://schemas.microsoft.com/office/drawing/2014/main" val="10006"/>
+                  </a:ext>
+                </a:extLst>
+              </a:tr>
+              <a:tr h="479372">
+                <a:tc>
+                  <a:txBody>
+                    <a:bodyPr/>
+                    <a:lstStyle/>
+                    <a:p>
+                      <a:r>
+                        <a:rPr lang="en-US" b="1" dirty="0"/>
+                        <a:t>Macro-Generated Implementations</a:t>
+                      </a:r>
+                      <a:endParaRPr lang="en-US" sz="1800" b="1" cap="none" spc="0" dirty="0">
+                        <a:solidFill>
+                          <a:schemeClr val="tx1"/>
+                        </a:solidFill>
+                      </a:endParaRPr>
+                    </a:p>
+                  </a:txBody>
+                  <a:tcPr marL="90876" marR="90876" marT="63613" marB="63613">
+                    <a:lnL w="28575" cap="flat" cmpd="sng" algn="ctr">
+                      <a:noFill/>
+                      <a:prstDash val="solid"/>
+                    </a:lnL>
+                    <a:lnR w="12700" cmpd="sng">
+                      <a:noFill/>
+                      <a:prstDash val="solid"/>
+                    </a:lnR>
+                    <a:lnT w="12700" cmpd="sng">
+                      <a:noFill/>
+                      <a:prstDash val="solid"/>
+                    </a:lnT>
+                    <a:lnB w="12700" cap="flat" cmpd="sng" algn="ctr">
+                      <a:noFill/>
+                      <a:prstDash val="solid"/>
+                    </a:lnB>
+                    <a:noFill/>
+                  </a:tcPr>
+                </a:tc>
+                <a:tc>
+                  <a:txBody>
+                    <a:bodyPr/>
+                    <a:lstStyle/>
+                    <a:p>
+                      <a:r>
+                        <a:rPr lang="en-US" sz="1800" cap="none" spc="0" dirty="0">
+                          <a:solidFill>
+                            <a:schemeClr val="tx1"/>
+                          </a:solidFill>
+                        </a:rPr>
+                        <a:t>When #2 doesn’t work because “coherence”</a:t>
+                      </a:r>
+                    </a:p>
+                  </a:txBody>
+                  <a:tcPr marL="90876" marR="90876" marT="63613" marB="63613">
+                    <a:lnL w="12700" cmpd="sng">
+                      <a:noFill/>
+                      <a:prstDash val="solid"/>
+                    </a:lnL>
+                    <a:lnR w="28575" cap="flat" cmpd="sng" algn="ctr">
+                      <a:noFill/>
+                      <a:prstDash val="solid"/>
+                    </a:lnR>
+                    <a:lnT w="12700" cmpd="sng">
+                      <a:noFill/>
+                      <a:prstDash val="solid"/>
+                    </a:lnT>
+                    <a:lnB w="12700" cap="flat" cmpd="sng" algn="ctr">
+                      <a:noFill/>
+                      <a:prstDash val="solid"/>
+                    </a:lnB>
+                    <a:noFill/>
+                  </a:tcPr>
+                </a:tc>
+                <a:extLst>
+                  <a:ext uri="{0D108BD9-81ED-4DB2-BD59-A6C34878D82A}">
+                    <a16:rowId xmlns:a16="http://schemas.microsoft.com/office/drawing/2014/main" val="10007"/>
+                  </a:ext>
+                </a:extLst>
+              </a:tr>
+              <a:tr h="440714">
+                <a:tc>
+                  <a:txBody>
+                    <a:bodyPr/>
+                    <a:lstStyle/>
+                    <a:p>
+                      <a:r>
+                        <a:rPr lang="en-US" sz="1800" b="1" cap="none" spc="0" dirty="0">
+                          <a:solidFill>
+                            <a:schemeClr val="tx1"/>
+                          </a:solidFill>
+                        </a:rPr>
+                        <a:t>Constraint-Gated Methods</a:t>
+                      </a:r>
+                    </a:p>
+                  </a:txBody>
+                  <a:tcPr marL="90876" marR="90876" marT="63613" marB="63613">
+                    <a:lnL w="12700" cmpd="sng">
+                      <a:noFill/>
+                      <a:prstDash val="solid"/>
+                    </a:lnL>
+                    <a:lnR w="12700" cmpd="sng">
+                      <a:noFill/>
+                      <a:prstDash val="solid"/>
+                    </a:lnR>
+                    <a:lnT w="12700" cap="flat" cmpd="sng" algn="ctr">
+                      <a:noFill/>
+                      <a:prstDash val="solid"/>
+                    </a:lnT>
+                    <a:lnB w="12700" cmpd="sng">
+                      <a:noFill/>
+                      <a:prstDash val="solid"/>
+                    </a:lnB>
+                    <a:solidFill>
+                      <a:schemeClr val="bg1">
+                        <a:lumMod val="95000"/>
+                      </a:schemeClr>
+                    </a:solidFill>
+                  </a:tcPr>
+                </a:tc>
+                <a:tc>
+                  <a:txBody>
+                    <a:bodyPr/>
+                    <a:lstStyle/>
+                    <a:p>
+                      <a:r>
+                        <a:rPr lang="en-US" sz="1800" cap="none" spc="0" dirty="0">
+                          <a:solidFill>
+                            <a:schemeClr val="tx1"/>
+                          </a:solidFill>
+                        </a:rPr>
+                        <a:t>e.g. when const N=8, add a method</a:t>
+                      </a:r>
+                    </a:p>
+                  </a:txBody>
+                  <a:tcPr marL="90876" marR="90876" marT="63613" marB="63613">
+                    <a:lnL w="12700" cmpd="sng">
+                      <a:noFill/>
+                      <a:prstDash val="solid"/>
+                    </a:lnL>
+                    <a:lnR w="12700" cmpd="sng">
+                      <a:noFill/>
+                      <a:prstDash val="solid"/>
+                    </a:lnR>
+                    <a:lnT w="12700" cap="flat" cmpd="sng" algn="ctr">
+                      <a:noFill/>
+                      <a:prstDash val="solid"/>
+                    </a:lnT>
+                    <a:lnB w="12700" cmpd="sng">
+                      <a:noFill/>
+                      <a:prstDash val="solid"/>
+                    </a:lnB>
+                    <a:solidFill>
+                      <a:schemeClr val="bg1">
+                        <a:lumMod val="95000"/>
+                      </a:schemeClr>
+                    </a:solidFill>
+                  </a:tcPr>
+                </a:tc>
+                <a:extLst>
+                  <a:ext uri="{0D108BD9-81ED-4DB2-BD59-A6C34878D82A}">
+                    <a16:rowId xmlns:a16="http://schemas.microsoft.com/office/drawing/2014/main" val="10008"/>
+                  </a:ext>
+                </a:extLst>
+              </a:tr>
+              <a:tr h="479372">
+                <a:tc>
+                  <a:txBody>
+                    <a:bodyPr/>
+                    <a:lstStyle/>
+                    <a:p>
+                      <a:r>
+                        <a:rPr lang="en-US" sz="1800" b="1" cap="none" spc="0">
+                          <a:solidFill>
+                            <a:schemeClr val="tx1"/>
+                          </a:solidFill>
+                        </a:rPr>
+                        <a:t>Method-Level Constraints</a:t>
+                      </a:r>
+                    </a:p>
+                  </a:txBody>
+                  <a:tcPr marL="90876" marR="90876" marT="63613" marB="63613">
+                    <a:lnL w="28575" cap="flat" cmpd="sng" algn="ctr">
+                      <a:noFill/>
+                      <a:prstDash val="solid"/>
+                    </a:lnL>
+                    <a:lnR w="12700" cmpd="sng">
+                      <a:noFill/>
+                      <a:prstDash val="solid"/>
+                    </a:lnR>
+                    <a:lnT w="12700" cmpd="sng">
+                      <a:noFill/>
+                      <a:prstDash val="solid"/>
+                    </a:lnT>
+                    <a:lnB w="28575" cap="flat" cmpd="sng" algn="ctr">
+                      <a:noFill/>
+                      <a:prstDash val="solid"/>
+                    </a:lnB>
+                    <a:noFill/>
+                  </a:tcPr>
+                </a:tc>
+                <a:tc>
+                  <a:txBody>
+                    <a:bodyPr/>
+                    <a:lstStyle/>
+                    <a:p>
+                      <a:r>
+                        <a:rPr lang="en-US" sz="1800" cap="none" spc="0" dirty="0">
+                          <a:solidFill>
+                            <a:schemeClr val="tx1"/>
+                          </a:solidFill>
+                        </a:rPr>
+                        <a:t>e.g. method defined when T: </a:t>
+                      </a:r>
+                      <a:r>
+                        <a:rPr lang="en-US" sz="1800" cap="none" spc="0" dirty="0" err="1">
+                          <a:solidFill>
+                            <a:schemeClr val="tx1"/>
+                          </a:solidFill>
+                        </a:rPr>
+                        <a:t>Serialize+etc</a:t>
+                      </a:r>
+                      <a:endParaRPr lang="en-US" sz="1800" cap="none" spc="0" dirty="0">
+                        <a:solidFill>
+                          <a:schemeClr val="tx1"/>
+                        </a:solidFill>
+                      </a:endParaRPr>
+                    </a:p>
+                  </a:txBody>
+                  <a:tcPr marL="90876" marR="90876" marT="63613" marB="63613">
+                    <a:lnL w="12700" cmpd="sng">
+                      <a:noFill/>
+                      <a:prstDash val="solid"/>
+                    </a:lnL>
+                    <a:lnR w="28575" cap="flat" cmpd="sng" algn="ctr">
+                      <a:noFill/>
+                      <a:prstDash val="solid"/>
+                    </a:lnR>
+                    <a:lnT w="12700" cmpd="sng">
+                      <a:noFill/>
+                      <a:prstDash val="solid"/>
+                    </a:lnT>
+                    <a:lnB w="28575" cap="flat" cmpd="sng" algn="ctr">
+                      <a:noFill/>
+                      <a:prstDash val="solid"/>
+                    </a:lnB>
+                    <a:noFill/>
+                  </a:tcPr>
+                </a:tc>
+                <a:extLst>
+                  <a:ext uri="{0D108BD9-81ED-4DB2-BD59-A6C34878D82A}">
+                    <a16:rowId xmlns:a16="http://schemas.microsoft.com/office/drawing/2014/main" val="10009"/>
+                  </a:ext>
+                </a:extLst>
+              </a:tr>
+            </a:tbl>
+          </a:graphicData>
+        </a:graphic>
+      </p:graphicFrame>
     </p:spTree>
     <p:extLst>
       <p:ext uri="{BB962C8B-B14F-4D97-AF65-F5344CB8AC3E}">

--- a/docs/outro.pptx
+++ b/docs/outro.pptx
@@ -3217,7 +3217,7 @@
           <p:nvPr>
             <p:extLst>
               <p:ext uri="{D42A27DB-BD31-4B8C-83A1-F6EECF244321}">
-                <p14:modId xmlns:p14="http://schemas.microsoft.com/office/powerpoint/2010/main" val="705945333"/>
+                <p14:modId xmlns:p14="http://schemas.microsoft.com/office/powerpoint/2010/main" val="2439306137"/>
               </p:ext>
             </p:extLst>
           </p:nvPr>
@@ -3330,21 +3330,18 @@
                     <a:lstStyle/>
                     <a:p>
                       <a:r>
-                        <a:rPr lang="en-US" sz="1800" b="1" cap="none" spc="0" dirty="0" err="1">
+                        <a:rPr lang="en-US" sz="1800" b="1" cap="none" spc="0">
                           <a:solidFill>
                             <a:schemeClr val="tx1"/>
                           </a:solidFill>
                         </a:rPr>
                         <a:t>Supertrait</a:t>
                       </a:r>
-                      <a:r>
-                        <a:rPr lang="en-US" sz="1800" b="1" cap="none" spc="0" dirty="0">
-                          <a:solidFill>
-                            <a:schemeClr val="tx1"/>
-                          </a:solidFill>
-                        </a:rPr>
-                        <a:t> Default Methods</a:t>
-                      </a:r>
+                      <a:endParaRPr lang="en-US" sz="1800" b="1" cap="none" spc="0" dirty="0">
+                        <a:solidFill>
+                          <a:schemeClr val="tx1"/>
+                        </a:solidFill>
+                      </a:endParaRPr>
                     </a:p>
                   </a:txBody>
                   <a:tcPr marL="90876" marR="90876" marT="63613" marB="63613">
